--- a/.lessons/58 Backend Product And Related Features/21 Product Variant- show created data at data table/1.pptx
+++ b/.lessons/58 Backend Product And Related Features/21 Product Variant- show created data at data table/1.pptx
@@ -6,8 +6,10 @@
   </p:sldMasterIdLst>
   <p:sldIdLst>
     <p:sldId id="413" r:id="rId2"/>
-    <p:sldId id="414" r:id="rId3"/>
-    <p:sldId id="400" r:id="rId4"/>
+    <p:sldId id="415" r:id="rId3"/>
+    <p:sldId id="416" r:id="rId4"/>
+    <p:sldId id="414" r:id="rId5"/>
+    <p:sldId id="400" r:id="rId6"/>
   </p:sldIdLst>
   <p:sldSz cx="12192000" cy="6858000"/>
   <p:notesSz cx="6858000" cy="9144000"/>
@@ -261,7 +263,7 @@
           <a:p>
             <a:fld id="{3E102D2E-813C-461C-9963-687A650C48C0}" type="datetimeFigureOut">
               <a:rPr lang="en-US" smtClean="0"/>
-              <a:t>6/26/2025</a:t>
+              <a:t>10/9/2025</a:t>
             </a:fld>
             <a:endParaRPr lang="en-US"/>
           </a:p>
@@ -459,7 +461,7 @@
           <a:p>
             <a:fld id="{3E102D2E-813C-461C-9963-687A650C48C0}" type="datetimeFigureOut">
               <a:rPr lang="en-US" smtClean="0"/>
-              <a:t>6/26/2025</a:t>
+              <a:t>10/9/2025</a:t>
             </a:fld>
             <a:endParaRPr lang="en-US"/>
           </a:p>
@@ -667,7 +669,7 @@
           <a:p>
             <a:fld id="{3E102D2E-813C-461C-9963-687A650C48C0}" type="datetimeFigureOut">
               <a:rPr lang="en-US" smtClean="0"/>
-              <a:t>6/26/2025</a:t>
+              <a:t>10/9/2025</a:t>
             </a:fld>
             <a:endParaRPr lang="en-US"/>
           </a:p>
@@ -865,7 +867,7 @@
           <a:p>
             <a:fld id="{3E102D2E-813C-461C-9963-687A650C48C0}" type="datetimeFigureOut">
               <a:rPr lang="en-US" smtClean="0"/>
-              <a:t>6/26/2025</a:t>
+              <a:t>10/9/2025</a:t>
             </a:fld>
             <a:endParaRPr lang="en-US"/>
           </a:p>
@@ -1140,7 +1142,7 @@
           <a:p>
             <a:fld id="{3E102D2E-813C-461C-9963-687A650C48C0}" type="datetimeFigureOut">
               <a:rPr lang="en-US" smtClean="0"/>
-              <a:t>6/26/2025</a:t>
+              <a:t>10/9/2025</a:t>
             </a:fld>
             <a:endParaRPr lang="en-US"/>
           </a:p>
@@ -1405,7 +1407,7 @@
           <a:p>
             <a:fld id="{3E102D2E-813C-461C-9963-687A650C48C0}" type="datetimeFigureOut">
               <a:rPr lang="en-US" smtClean="0"/>
-              <a:t>6/26/2025</a:t>
+              <a:t>10/9/2025</a:t>
             </a:fld>
             <a:endParaRPr lang="en-US"/>
           </a:p>
@@ -1817,7 +1819,7 @@
           <a:p>
             <a:fld id="{3E102D2E-813C-461C-9963-687A650C48C0}" type="datetimeFigureOut">
               <a:rPr lang="en-US" smtClean="0"/>
-              <a:t>6/26/2025</a:t>
+              <a:t>10/9/2025</a:t>
             </a:fld>
             <a:endParaRPr lang="en-US"/>
           </a:p>
@@ -1958,7 +1960,7 @@
           <a:p>
             <a:fld id="{3E102D2E-813C-461C-9963-687A650C48C0}" type="datetimeFigureOut">
               <a:rPr lang="en-US" smtClean="0"/>
-              <a:t>6/26/2025</a:t>
+              <a:t>10/9/2025</a:t>
             </a:fld>
             <a:endParaRPr lang="en-US"/>
           </a:p>
@@ -2071,7 +2073,7 @@
           <a:p>
             <a:fld id="{3E102D2E-813C-461C-9963-687A650C48C0}" type="datetimeFigureOut">
               <a:rPr lang="en-US" smtClean="0"/>
-              <a:t>6/26/2025</a:t>
+              <a:t>10/9/2025</a:t>
             </a:fld>
             <a:endParaRPr lang="en-US"/>
           </a:p>
@@ -2382,7 +2384,7 @@
           <a:p>
             <a:fld id="{3E102D2E-813C-461C-9963-687A650C48C0}" type="datetimeFigureOut">
               <a:rPr lang="en-US" smtClean="0"/>
-              <a:t>6/26/2025</a:t>
+              <a:t>10/9/2025</a:t>
             </a:fld>
             <a:endParaRPr lang="en-US"/>
           </a:p>
@@ -2670,7 +2672,7 @@
           <a:p>
             <a:fld id="{3E102D2E-813C-461C-9963-687A650C48C0}" type="datetimeFigureOut">
               <a:rPr lang="en-US" smtClean="0"/>
-              <a:t>6/26/2025</a:t>
+              <a:t>10/9/2025</a:t>
             </a:fld>
             <a:endParaRPr lang="en-US"/>
           </a:p>
@@ -2911,7 +2913,7 @@
           <a:p>
             <a:fld id="{3E102D2E-813C-461C-9963-687A650C48C0}" type="datetimeFigureOut">
               <a:rPr lang="en-US" smtClean="0"/>
-              <a:t>6/26/2025</a:t>
+              <a:t>10/9/2025</a:t>
             </a:fld>
             <a:endParaRPr lang="en-US"/>
           </a:p>
@@ -3369,21 +3371,54 @@
               <a:buNone/>
             </a:pPr>
             <a:r>
-              <a:rPr kumimoji="0" lang="en-US" altLang="en-US" sz="1300" b="0" i="0" u="none" strike="noStrike" cap="none" normalizeH="0" baseline="0">
-                <a:ln>
-                  <a:noFill/>
-                </a:ln>
-                <a:solidFill>
-                  <a:schemeClr val="tx1"/>
-                </a:solidFill>
-                <a:effectLst/>
+              <a:rPr lang="en-US" altLang="en-US" sz="1300">
                 <a:latin typeface="Arial" panose="020B0604020202020204" pitchFamily="34" charset="0"/>
               </a:rPr>
-              <a:t>.</a:t>
-            </a:r>
-          </a:p>
-        </p:txBody>
-      </p:sp>
+              <a:t>app\DataTables\ProductVariantDataTable.php</a:t>
+            </a:r>
+            <a:endParaRPr kumimoji="0" lang="en-US" altLang="en-US" sz="1300" b="0" i="0" u="none" strike="noStrike" cap="none" normalizeH="0" baseline="0">
+              <a:ln>
+                <a:noFill/>
+              </a:ln>
+              <a:solidFill>
+                <a:schemeClr val="tx1"/>
+              </a:solidFill>
+              <a:effectLst/>
+              <a:latin typeface="Arial" panose="020B0604020202020204" pitchFamily="34" charset="0"/>
+            </a:endParaRPr>
+          </a:p>
+        </p:txBody>
+      </p:sp>
+      <p:pic>
+        <p:nvPicPr>
+          <p:cNvPr id="4" name="Picture 3">
+            <a:extLst>
+              <a:ext uri="{FF2B5EF4-FFF2-40B4-BE49-F238E27FC236}">
+                <a16:creationId xmlns:a16="http://schemas.microsoft.com/office/drawing/2014/main" id="{0C3937C8-F4B0-FA1D-D39A-88A2994E3FF6}"/>
+              </a:ext>
+            </a:extLst>
+          </p:cNvPr>
+          <p:cNvPicPr>
+            <a:picLocks noChangeAspect="1"/>
+          </p:cNvPicPr>
+          <p:nvPr/>
+        </p:nvPicPr>
+        <p:blipFill>
+          <a:blip r:embed="rId2"/>
+          <a:stretch>
+            <a:fillRect/>
+          </a:stretch>
+        </p:blipFill>
+        <p:spPr>
+          <a:xfrm>
+            <a:off x="3491344" y="981240"/>
+            <a:ext cx="8700655" cy="5876759"/>
+          </a:xfrm>
+          <a:prstGeom prst="rect">
+            <a:avLst/>
+          </a:prstGeom>
+        </p:spPr>
+      </p:pic>
     </p:spTree>
     <p:extLst>
       <p:ext uri="{BB962C8B-B14F-4D97-AF65-F5344CB8AC3E}">
@@ -3398,6 +3433,244 @@
 </file>
 
 <file path=ppt/slides/slide2.xml><?xml version="1.0" encoding="utf-8"?>
+<p:sld xmlns:a="http://schemas.openxmlformats.org/drawingml/2006/main" xmlns:r="http://schemas.openxmlformats.org/officeDocument/2006/relationships" xmlns:p="http://schemas.openxmlformats.org/presentationml/2006/main">
+  <p:cSld>
+    <p:spTree>
+      <p:nvGrpSpPr>
+        <p:cNvPr id="1" name="">
+          <a:extLst>
+            <a:ext uri="{FF2B5EF4-FFF2-40B4-BE49-F238E27FC236}">
+              <a16:creationId xmlns:a16="http://schemas.microsoft.com/office/drawing/2014/main" id="{0A805223-D6D3-2E54-8896-1D3A546B4D3B}"/>
+            </a:ext>
+          </a:extLst>
+        </p:cNvPr>
+        <p:cNvGrpSpPr/>
+        <p:nvPr/>
+      </p:nvGrpSpPr>
+      <p:grpSpPr>
+        <a:xfrm>
+          <a:off x="0" y="0"/>
+          <a:ext cx="0" cy="0"/>
+          <a:chOff x="0" y="0"/>
+          <a:chExt cx="0" cy="0"/>
+        </a:xfrm>
+      </p:grpSpPr>
+      <p:sp>
+        <p:nvSpPr>
+          <p:cNvPr id="3" name="TextBox 2">
+            <a:extLst>
+              <a:ext uri="{FF2B5EF4-FFF2-40B4-BE49-F238E27FC236}">
+                <a16:creationId xmlns:a16="http://schemas.microsoft.com/office/drawing/2014/main" id="{902E5BB8-B7E7-6D0A-8F79-180C1145C0DD}"/>
+              </a:ext>
+            </a:extLst>
+          </p:cNvPr>
+          <p:cNvSpPr txBox="1"/>
+          <p:nvPr/>
+        </p:nvSpPr>
+        <p:spPr>
+          <a:xfrm>
+            <a:off x="217714" y="255046"/>
+            <a:ext cx="11756571" cy="355354"/>
+          </a:xfrm>
+          <a:prstGeom prst="rect">
+            <a:avLst/>
+          </a:prstGeom>
+          <a:noFill/>
+        </p:spPr>
+        <p:txBody>
+          <a:bodyPr wrap="square">
+            <a:spAutoFit/>
+          </a:bodyPr>
+          <a:lstStyle/>
+          <a:p>
+            <a:pPr>
+              <a:lnSpc>
+                <a:spcPct val="150000"/>
+              </a:lnSpc>
+              <a:buNone/>
+            </a:pPr>
+            <a:r>
+              <a:rPr lang="en-US" altLang="en-US" sz="1300">
+                <a:latin typeface="Arial" panose="020B0604020202020204" pitchFamily="34" charset="0"/>
+              </a:rPr>
+              <a:t>app\DataTables\ProductVariantDataTable.php</a:t>
+            </a:r>
+            <a:endParaRPr kumimoji="0" lang="en-US" altLang="en-US" sz="1300" b="0" i="0" u="none" strike="noStrike" cap="none" normalizeH="0" baseline="0">
+              <a:ln>
+                <a:noFill/>
+              </a:ln>
+              <a:solidFill>
+                <a:schemeClr val="tx1"/>
+              </a:solidFill>
+              <a:effectLst/>
+              <a:latin typeface="Arial" panose="020B0604020202020204" pitchFamily="34" charset="0"/>
+            </a:endParaRPr>
+          </a:p>
+        </p:txBody>
+      </p:sp>
+      <p:pic>
+        <p:nvPicPr>
+          <p:cNvPr id="4" name="Picture 3">
+            <a:extLst>
+              <a:ext uri="{FF2B5EF4-FFF2-40B4-BE49-F238E27FC236}">
+                <a16:creationId xmlns:a16="http://schemas.microsoft.com/office/drawing/2014/main" id="{E23DAD82-07A0-B122-BF57-69762C147989}"/>
+              </a:ext>
+            </a:extLst>
+          </p:cNvPr>
+          <p:cNvPicPr>
+            <a:picLocks noChangeAspect="1"/>
+          </p:cNvPicPr>
+          <p:nvPr/>
+        </p:nvPicPr>
+        <p:blipFill>
+          <a:blip r:embed="rId2"/>
+          <a:stretch>
+            <a:fillRect/>
+          </a:stretch>
+        </p:blipFill>
+        <p:spPr>
+          <a:xfrm>
+            <a:off x="7597071" y="0"/>
+            <a:ext cx="4594929" cy="6858000"/>
+          </a:xfrm>
+          <a:prstGeom prst="rect">
+            <a:avLst/>
+          </a:prstGeom>
+        </p:spPr>
+      </p:pic>
+    </p:spTree>
+    <p:extLst>
+      <p:ext uri="{BB962C8B-B14F-4D97-AF65-F5344CB8AC3E}">
+        <p14:creationId xmlns:p14="http://schemas.microsoft.com/office/powerpoint/2010/main" val="1119377397"/>
+      </p:ext>
+    </p:extLst>
+  </p:cSld>
+  <p:clrMapOvr>
+    <a:masterClrMapping/>
+  </p:clrMapOvr>
+</p:sld>
+</file>
+
+<file path=ppt/slides/slide3.xml><?xml version="1.0" encoding="utf-8"?>
+<p:sld xmlns:a="http://schemas.openxmlformats.org/drawingml/2006/main" xmlns:r="http://schemas.openxmlformats.org/officeDocument/2006/relationships" xmlns:p="http://schemas.openxmlformats.org/presentationml/2006/main">
+  <p:cSld>
+    <p:spTree>
+      <p:nvGrpSpPr>
+        <p:cNvPr id="1" name="">
+          <a:extLst>
+            <a:ext uri="{FF2B5EF4-FFF2-40B4-BE49-F238E27FC236}">
+              <a16:creationId xmlns:a16="http://schemas.microsoft.com/office/drawing/2014/main" id="{3845DFE4-9FB5-C84C-9CCC-14D0A662A7A2}"/>
+            </a:ext>
+          </a:extLst>
+        </p:cNvPr>
+        <p:cNvGrpSpPr/>
+        <p:nvPr/>
+      </p:nvGrpSpPr>
+      <p:grpSpPr>
+        <a:xfrm>
+          <a:off x="0" y="0"/>
+          <a:ext cx="0" cy="0"/>
+          <a:chOff x="0" y="0"/>
+          <a:chExt cx="0" cy="0"/>
+        </a:xfrm>
+      </p:grpSpPr>
+      <p:sp>
+        <p:nvSpPr>
+          <p:cNvPr id="3" name="TextBox 2">
+            <a:extLst>
+              <a:ext uri="{FF2B5EF4-FFF2-40B4-BE49-F238E27FC236}">
+                <a16:creationId xmlns:a16="http://schemas.microsoft.com/office/drawing/2014/main" id="{CD4F7634-A330-00A0-0D14-C8E2BA35EEBD}"/>
+              </a:ext>
+            </a:extLst>
+          </p:cNvPr>
+          <p:cNvSpPr txBox="1"/>
+          <p:nvPr/>
+        </p:nvSpPr>
+        <p:spPr>
+          <a:xfrm>
+            <a:off x="217714" y="255046"/>
+            <a:ext cx="11756571" cy="355354"/>
+          </a:xfrm>
+          <a:prstGeom prst="rect">
+            <a:avLst/>
+          </a:prstGeom>
+          <a:noFill/>
+        </p:spPr>
+        <p:txBody>
+          <a:bodyPr wrap="square">
+            <a:spAutoFit/>
+          </a:bodyPr>
+          <a:lstStyle/>
+          <a:p>
+            <a:pPr>
+              <a:lnSpc>
+                <a:spcPct val="150000"/>
+              </a:lnSpc>
+              <a:buNone/>
+            </a:pPr>
+            <a:r>
+              <a:rPr lang="en-US" altLang="en-US" sz="1300">
+                <a:latin typeface="Arial" panose="020B0604020202020204" pitchFamily="34" charset="0"/>
+              </a:rPr>
+              <a:t>app\DataTables\ProductVariantDataTable.php</a:t>
+            </a:r>
+            <a:endParaRPr kumimoji="0" lang="en-US" altLang="en-US" sz="1300" b="0" i="0" u="none" strike="noStrike" cap="none" normalizeH="0" baseline="0">
+              <a:ln>
+                <a:noFill/>
+              </a:ln>
+              <a:solidFill>
+                <a:schemeClr val="tx1"/>
+              </a:solidFill>
+              <a:effectLst/>
+              <a:latin typeface="Arial" panose="020B0604020202020204" pitchFamily="34" charset="0"/>
+            </a:endParaRPr>
+          </a:p>
+        </p:txBody>
+      </p:sp>
+      <p:pic>
+        <p:nvPicPr>
+          <p:cNvPr id="4" name="Picture 3">
+            <a:extLst>
+              <a:ext uri="{FF2B5EF4-FFF2-40B4-BE49-F238E27FC236}">
+                <a16:creationId xmlns:a16="http://schemas.microsoft.com/office/drawing/2014/main" id="{335DF288-6DBB-BC71-EF74-C4C9C7ABEA40}"/>
+              </a:ext>
+            </a:extLst>
+          </p:cNvPr>
+          <p:cNvPicPr>
+            <a:picLocks noChangeAspect="1"/>
+          </p:cNvPicPr>
+          <p:nvPr/>
+        </p:nvPicPr>
+        <p:blipFill>
+          <a:blip r:embed="rId2"/>
+          <a:stretch>
+            <a:fillRect/>
+          </a:stretch>
+        </p:blipFill>
+        <p:spPr>
+          <a:xfrm>
+            <a:off x="7843357" y="0"/>
+            <a:ext cx="4348643" cy="6858000"/>
+          </a:xfrm>
+          <a:prstGeom prst="rect">
+            <a:avLst/>
+          </a:prstGeom>
+        </p:spPr>
+      </p:pic>
+    </p:spTree>
+    <p:extLst>
+      <p:ext uri="{BB962C8B-B14F-4D97-AF65-F5344CB8AC3E}">
+        <p14:creationId xmlns:p14="http://schemas.microsoft.com/office/powerpoint/2010/main" val="3771877841"/>
+      </p:ext>
+    </p:extLst>
+  </p:cSld>
+  <p:clrMapOvr>
+    <a:masterClrMapping/>
+  </p:clrMapOvr>
+</p:sld>
+</file>
+
+<file path=ppt/slides/slide4.xml><?xml version="1.0" encoding="utf-8"?>
 <p:sld xmlns:a="http://schemas.openxmlformats.org/drawingml/2006/main" xmlns:r="http://schemas.openxmlformats.org/officeDocument/2006/relationships" xmlns:p="http://schemas.openxmlformats.org/presentationml/2006/main">
   <p:cSld>
     <p:spTree>
@@ -3470,6 +3743,46 @@
           </a:p>
         </p:txBody>
       </p:sp>
+      <p:pic>
+        <p:nvPicPr>
+          <p:cNvPr id="4" name="Picture 3">
+            <a:extLst>
+              <a:ext uri="{FF2B5EF4-FFF2-40B4-BE49-F238E27FC236}">
+                <a16:creationId xmlns:a16="http://schemas.microsoft.com/office/drawing/2014/main" id="{71FB2B0A-813D-5C03-628F-6E6E9886852C}"/>
+              </a:ext>
+            </a:extLst>
+          </p:cNvPr>
+          <p:cNvPicPr>
+            <a:picLocks noChangeAspect="1"/>
+          </p:cNvPicPr>
+          <p:nvPr/>
+        </p:nvPicPr>
+        <p:blipFill>
+          <a:blip r:embed="rId2"/>
+          <a:stretch>
+            <a:fillRect/>
+          </a:stretch>
+        </p:blipFill>
+        <p:spPr>
+          <a:xfrm>
+            <a:off x="0" y="1082183"/>
+            <a:ext cx="12192000" cy="4693634"/>
+          </a:xfrm>
+          <a:prstGeom prst="rect">
+            <a:avLst/>
+          </a:prstGeom>
+          <a:ln>
+            <a:noFill/>
+          </a:ln>
+          <a:effectLst>
+            <a:outerShdw blurRad="292100" dist="139700" dir="2700000" algn="tl" rotWithShape="0">
+              <a:srgbClr val="333333">
+                <a:alpha val="65000"/>
+              </a:srgbClr>
+            </a:outerShdw>
+          </a:effectLst>
+        </p:spPr>
+      </p:pic>
     </p:spTree>
     <p:extLst>
       <p:ext uri="{BB962C8B-B14F-4D97-AF65-F5344CB8AC3E}">
@@ -3483,7 +3796,7 @@
 </p:sld>
 </file>
 
-<file path=ppt/slides/slide3.xml><?xml version="1.0" encoding="utf-8"?>
+<file path=ppt/slides/slide5.xml><?xml version="1.0" encoding="utf-8"?>
 <p:sld xmlns:a="http://schemas.openxmlformats.org/drawingml/2006/main" xmlns:r="http://schemas.openxmlformats.org/officeDocument/2006/relationships" xmlns:p="http://schemas.openxmlformats.org/presentationml/2006/main">
   <p:cSld>
     <p:spTree>
